--- a/presentation/final_presentation.pptx
+++ b/presentation/final_presentation.pptx
@@ -4049,21 +4049,237 @@
               </a:defRPr>
             </a:pPr>
             <a:r>
-              <a:t>Final Comparison — Pending</a:t>
-            </a:r>
-          </a:p>
-        </p:txBody>
-      </p:sp>
-      <p:sp>
-        <p:nvSpPr>
-          <p:cNvPr id="3" name="TextBox 2"/>
+              <a:t>Final Comparison (Both Models, Postprocessed)</a:t>
+            </a:r>
+          </a:p>
+        </p:txBody>
+      </p:sp>
+      <p:graphicFrame>
+        <p:nvGraphicFramePr>
+          <p:cNvPr id="3" name="Table 2"/>
+          <p:cNvGraphicFramePr>
+            <a:graphicFrameLocks noGrp="1"/>
+          </p:cNvGraphicFramePr>
+          <p:nvPr/>
+        </p:nvGraphicFramePr>
+        <p:xfrm>
+          <a:off x="731520" y="1645920"/>
+          <a:ext cx="10728655" cy="1371600"/>
+        </p:xfrm>
+        <a:graphic>
+          <a:graphicData uri="http://schemas.openxmlformats.org/drawingml/2006/table">
+            <a:tbl>
+              <a:tblPr firstRow="1" bandRow="1">
+                <a:tableStyleId>{5C22544A-7EE6-4342-B048-85BDC9FD1C3A}</a:tableStyleId>
+              </a:tblPr>
+              <a:tblGrid>
+                <a:gridCol w="3576218"/>
+                <a:gridCol w="3576218"/>
+                <a:gridCol w="3576219"/>
+              </a:tblGrid>
+              <a:tr h="457200">
+                <a:tc>
+                  <a:txBody>
+                    <a:bodyPr/>
+                    <a:lstStyle/>
+                    <a:p>
+                      <a:pPr>
+                        <a:defRPr b="1" sz="1500">
+                          <a:solidFill>
+                            <a:srgbClr val="FFFFFF"/>
+                          </a:solidFill>
+                        </a:defRPr>
+                      </a:pPr>
+                      <a:r>
+                        <a:t>Model</a:t>
+                      </a:r>
+                    </a:p>
+                  </a:txBody>
+                  <a:tcPr>
+                    <a:solidFill>
+                      <a:srgbClr val="1F3A5F"/>
+                    </a:solidFill>
+                  </a:tcPr>
+                </a:tc>
+                <a:tc>
+                  <a:txBody>
+                    <a:bodyPr/>
+                    <a:lstStyle/>
+                    <a:p>
+                      <a:pPr>
+                        <a:defRPr b="1" sz="1500">
+                          <a:solidFill>
+                            <a:srgbClr val="FFFFFF"/>
+                          </a:solidFill>
+                        </a:defRPr>
+                      </a:pPr>
+                      <a:r>
+                        <a:t>Mean Dice</a:t>
+                      </a:r>
+                    </a:p>
+                  </a:txBody>
+                  <a:tcPr>
+                    <a:solidFill>
+                      <a:srgbClr val="1F3A5F"/>
+                    </a:solidFill>
+                  </a:tcPr>
+                </a:tc>
+                <a:tc>
+                  <a:txBody>
+                    <a:bodyPr/>
+                    <a:lstStyle/>
+                    <a:p>
+                      <a:pPr>
+                        <a:defRPr b="1" sz="1500">
+                          <a:solidFill>
+                            <a:srgbClr val="FFFFFF"/>
+                          </a:solidFill>
+                        </a:defRPr>
+                      </a:pPr>
+                      <a:r>
+                        <a:t>Mean HD95 (mm)</a:t>
+                      </a:r>
+                    </a:p>
+                  </a:txBody>
+                  <a:tcPr>
+                    <a:solidFill>
+                      <a:srgbClr val="1F3A5F"/>
+                    </a:solidFill>
+                  </a:tcPr>
+                </a:tc>
+              </a:tr>
+              <a:tr h="457200">
+                <a:tc>
+                  <a:txBody>
+                    <a:bodyPr/>
+                    <a:lstStyle/>
+                    <a:p>
+                      <a:pPr>
+                        <a:defRPr sz="1400">
+                          <a:solidFill>
+                            <a:srgbClr val="222222"/>
+                          </a:solidFill>
+                        </a:defRPr>
+                      </a:pPr>
+                      <a:r>
+                        <a:t>3D U-Net (baseline)</a:t>
+                      </a:r>
+                    </a:p>
+                  </a:txBody>
+                  <a:tcPr/>
+                </a:tc>
+                <a:tc>
+                  <a:txBody>
+                    <a:bodyPr/>
+                    <a:lstStyle/>
+                    <a:p>
+                      <a:pPr>
+                        <a:defRPr sz="1400">
+                          <a:solidFill>
+                            <a:srgbClr val="222222"/>
+                          </a:solidFill>
+                        </a:defRPr>
+                      </a:pPr>
+                      <a:r>
+                        <a:t>0.6907</a:t>
+                      </a:r>
+                    </a:p>
+                  </a:txBody>
+                  <a:tcPr/>
+                </a:tc>
+                <a:tc>
+                  <a:txBody>
+                    <a:bodyPr/>
+                    <a:lstStyle/>
+                    <a:p>
+                      <a:pPr>
+                        <a:defRPr sz="1400">
+                          <a:solidFill>
+                            <a:srgbClr val="222222"/>
+                          </a:solidFill>
+                        </a:defRPr>
+                      </a:pPr>
+                      <a:r>
+                        <a:t>33.90</a:t>
+                      </a:r>
+                    </a:p>
+                  </a:txBody>
+                  <a:tcPr/>
+                </a:tc>
+              </a:tr>
+              <a:tr h="457200">
+                <a:tc>
+                  <a:txBody>
+                    <a:bodyPr/>
+                    <a:lstStyle/>
+                    <a:p>
+                      <a:pPr>
+                        <a:defRPr sz="1400">
+                          <a:solidFill>
+                            <a:srgbClr val="222222"/>
+                          </a:solidFill>
+                        </a:defRPr>
+                      </a:pPr>
+                      <a:r>
+                        <a:t>Swin UNETR</a:t>
+                      </a:r>
+                    </a:p>
+                  </a:txBody>
+                  <a:tcPr/>
+                </a:tc>
+                <a:tc>
+                  <a:txBody>
+                    <a:bodyPr/>
+                    <a:lstStyle/>
+                    <a:p>
+                      <a:pPr>
+                        <a:defRPr sz="1400">
+                          <a:solidFill>
+                            <a:srgbClr val="222222"/>
+                          </a:solidFill>
+                        </a:defRPr>
+                      </a:pPr>
+                      <a:r>
+                        <a:t>0.7649</a:t>
+                      </a:r>
+                    </a:p>
+                  </a:txBody>
+                  <a:tcPr/>
+                </a:tc>
+                <a:tc>
+                  <a:txBody>
+                    <a:bodyPr/>
+                    <a:lstStyle/>
+                    <a:p>
+                      <a:pPr>
+                        <a:defRPr sz="1400">
+                          <a:solidFill>
+                            <a:srgbClr val="222222"/>
+                          </a:solidFill>
+                        </a:defRPr>
+                      </a:pPr>
+                      <a:r>
+                        <a:t>18.46</a:t>
+                      </a:r>
+                    </a:p>
+                  </a:txBody>
+                  <a:tcPr/>
+                </a:tc>
+              </a:tr>
+            </a:tbl>
+          </a:graphicData>
+        </a:graphic>
+      </p:graphicFrame>
+      <p:sp>
+        <p:nvSpPr>
+          <p:cNvPr id="4" name="TextBox 3"/>
           <p:cNvSpPr txBox="1"/>
           <p:nvPr/>
         </p:nvSpPr>
         <p:spPr>
           <a:xfrm>
-            <a:off x="731520" y="1554480"/>
-            <a:ext cx="10728655" cy="4754880"/>
+            <a:off x="731520" y="3154680"/>
+            <a:ext cx="10728655" cy="731520"/>
           </a:xfrm>
           <a:prstGeom prst="rect">
             <a:avLst/>
@@ -4077,74 +4293,6 @@
           <a:lstStyle/>
           <a:p>
             <a:pPr>
-              <a:spcAft>
-                <a:spcPts val="1000"/>
-              </a:spcAft>
-              <a:defRPr sz="1900">
-                <a:solidFill>
-                  <a:srgbClr val="222222"/>
-                </a:solidFill>
-              </a:defRPr>
-            </a:pPr>
-            <a:r>
-              <a:t>•  Swin UNETR has been evaluated with postprocessing (previous slide)</a:t>
-            </a:r>
-          </a:p>
-          <a:p>
-            <a:pPr>
-              <a:spcAft>
-                <a:spcPts val="1000"/>
-              </a:spcAft>
-              <a:defRPr sz="1900">
-                <a:solidFill>
-                  <a:srgbClr val="222222"/>
-                </a:solidFill>
-              </a:defRPr>
-            </a:pPr>
-            <a:r>
-              <a:t>•  The baseline has NOT been postprocessed yet — needed before claiming a final winner, since its raw HD95 (154mm) is just as bad and may have the same fixable cause</a:t>
-            </a:r>
-          </a:p>
-          <a:p>
-            <a:pPr>
-              <a:spcAft>
-                <a:spcPts val="1000"/>
-              </a:spcAft>
-              <a:defRPr sz="1900">
-                <a:solidFill>
-                  <a:srgbClr val="222222"/>
-                </a:solidFill>
-              </a:defRPr>
-            </a:pPr>
-            <a:r>
-              <a:t>•  TODO: run `sbatch slurm/evaluate.sbatch configs/baseline_unet.yaml outputs/baseline_unet_v1/best_model.pt "" postprocess` on Shenkar, pull the result, re-run this script</a:t>
-            </a:r>
-          </a:p>
-        </p:txBody>
-      </p:sp>
-      <p:sp>
-        <p:nvSpPr>
-          <p:cNvPr id="4" name="TextBox 3"/>
-          <p:cNvSpPr txBox="1"/>
-          <p:nvPr/>
-        </p:nvSpPr>
-        <p:spPr>
-          <a:xfrm>
-            <a:off x="731520" y="6217920"/>
-            <a:ext cx="10728655" cy="548640"/>
-          </a:xfrm>
-          <a:prstGeom prst="rect">
-            <a:avLst/>
-          </a:prstGeom>
-          <a:noFill/>
-        </p:spPr>
-        <p:txBody>
-          <a:bodyPr wrap="square">
-            <a:spAutoFit/>
-          </a:bodyPr>
-          <a:lstStyle/>
-          <a:p>
-            <a:pPr>
               <a:defRPr sz="1300" i="1">
                 <a:solidFill>
                   <a:srgbClr val="808080"/>
@@ -4152,7 +4300,7 @@
               </a:defRPr>
             </a:pPr>
             <a:r>
-              <a:t>TODO SLIDE — do not present a 'Swin UNETR wins' conclusion until this is filled in.</a:t>
+              <a:t>Evaluated identically (same postprocessing, same split). Swin UNETR wins both metrics: +0.0742 Dice, -15.43mm HD95. Caveat: postprocessing regressed one baseline case (spleen_44, Dice 0.157→0.0) — its largest predicted component wasn't the true spleen, so the fix isn't unconditionally safe. See reports/experiment_log.md.</a:t>
             </a:r>
           </a:p>
         </p:txBody>
@@ -4288,6 +4436,21 @@
               </a:defRPr>
             </a:pPr>
             <a:r>
+              <a:t>•  Largest-connected-component postprocessing is a strong heuristic, not a safe one: it regressed one baseline case (spleen_44) to Dice 0.0 when the largest predicted component wasn't the true spleen</a:t>
+            </a:r>
+          </a:p>
+          <a:p>
+            <a:pPr>
+              <a:spcAft>
+                <a:spcPts val="1000"/>
+              </a:spcAft>
+              <a:defRPr sz="1900">
+                <a:solidFill>
+                  <a:srgbClr val="222222"/>
+                </a:solidFill>
+              </a:defRPr>
+            </a:pPr>
+            <a:r>
               <a:t>•  Candidate next steps</a:t>
             </a:r>
           </a:p>
@@ -4303,7 +4466,7 @@
               </a:defRPr>
             </a:pPr>
             <a:r>
-              <a:t>–  Apply postprocessing to the baseline for a fully fair final comparison</a:t>
+              <a:t>–  A size-ratio guard before discarding components (e.g. only drop components below some fraction of the largest) to avoid the spleen_44-style regression</a:t>
             </a:r>
           </a:p>
           <a:p>
@@ -4318,7 +4481,7 @@
               </a:defRPr>
             </a:pPr>
             <a:r>
-              <a:t>–  Revisit whether early stopping is premature vs. a ceiling (train-loss curves alongside val-Dice)</a:t>
+              <a:t>–  Revisit whether early stopping is premature vs. a ceiling (train-loss curves alongside val-Dice, once pulled from the Shenkar server)</a:t>
             </a:r>
           </a:p>
           <a:p>
@@ -4454,7 +4617,7 @@
               </a:defRPr>
             </a:pPr>
             <a:r>
-              <a:t>•  The diagnosis led to a concrete, low-cost fix (largest-connected-component postprocessing) that nearly closed the gap: Dice 0.535→0.765, HD95 156→18mm</a:t>
+              <a:t>•  The diagnosis led to a concrete, low-cost fix (largest-connected-component postprocessing): applied to both models, Dice roughly doubled and HD95 dropped by 4-8x (baseline 0.475→0.691 Dice, 154→34mm HD95; Swin UNETR 0.535→0.765 Dice, 156→18mm HD95)</a:t>
             </a:r>
           </a:p>
           <a:p>
@@ -4469,7 +4632,22 @@
               </a:defRPr>
             </a:pPr>
             <a:r>
-              <a:t>•  Every stage of this process — including two failures — is documented as it happened in reports/experiment_log.md</a:t>
+              <a:t>•  Final result, both models evaluated identically: Swin UNETR wins on both Dice (0.765 vs. 0.691) and HD95 (18.5mm vs. 33.9mm) — a clear, if partial, win, with one documented exception (baseline's spleen_44) showing the fix isn't unconditionally safe</a:t>
+            </a:r>
+          </a:p>
+          <a:p>
+            <a:pPr>
+              <a:spcAft>
+                <a:spcPts val="1000"/>
+              </a:spcAft>
+              <a:defRPr sz="1900">
+                <a:solidFill>
+                  <a:srgbClr val="222222"/>
+                </a:solidFill>
+              </a:defRPr>
+            </a:pPr>
+            <a:r>
+              <a:t>•  Every stage of this process — including two failures and a fix's own limitation — is documented as it happened in reports/experiment_log.md</a:t>
             </a:r>
           </a:p>
         </p:txBody>
@@ -5271,7 +5449,19 @@
               </a:defRPr>
             </a:pPr>
             <a:r>
-              <a:t>Learning Curves</a:t>
+              <a:t>Training Dynamics</a:t>
+            </a:r>
+          </a:p>
+          <a:p>
+            <a:pPr>
+              <a:defRPr sz="1600">
+                <a:solidFill>
+                  <a:srgbClr val="C0392B"/>
+                </a:solidFill>
+              </a:defRPr>
+            </a:pPr>
+            <a:r>
+              <a:t>Per-epoch metrics.csv / learning_curve.png were generated on the Shenkar cluster only; not pulled locally for this deck</a:t>
             </a:r>
           </a:p>
         </p:txBody>
@@ -5309,7 +5499,7 @@
               </a:defRPr>
             </a:pPr>
             <a:r>
-              <a:t>•  Baseline 3D U-Net: early-stopped at epoch 75/100, best val Dice reached ~epoch 55</a:t>
+              <a:t>•  Baseline 3D U-Net: early-stopped at epoch 75/100 (patience=20), best val Dice reached ~epoch 55</a:t>
             </a:r>
           </a:p>
           <a:p>
@@ -5324,7 +5514,7 @@
               </a:defRPr>
             </a:pPr>
             <a:r>
-              <a:t>•  Swin UNETR: early-stopped at epoch 55/100 (restart of job 322, reproduced its dynamics exactly up to epoch 44, then continued to plateau)</a:t>
+              <a:t>•  Swin UNETR: early-stopped at epoch 55/100 — this run restarted after a Slurm time-limit cancellation at epoch 44 (job 322) and reproduced its training dynamics exactly up to that point (same seed), then continued to plateau</a:t>
             </a:r>
           </a:p>
           <a:p>
@@ -5339,42 +5529,7 @@
               </a:defRPr>
             </a:pPr>
             <a:r>
-              <a:t>•  TODO: insert learning_curve.png for both runs once pulled from the Shenkar server (experiments/&lt;run_name&gt;/learning_curve.png) — re-run this script afterward to auto-embed them</a:t>
-            </a:r>
-          </a:p>
-        </p:txBody>
-      </p:sp>
-      <p:sp>
-        <p:nvSpPr>
-          <p:cNvPr id="4" name="TextBox 3"/>
-          <p:cNvSpPr txBox="1"/>
-          <p:nvPr/>
-        </p:nvSpPr>
-        <p:spPr>
-          <a:xfrm>
-            <a:off x="731520" y="6217920"/>
-            <a:ext cx="10728655" cy="548640"/>
-          </a:xfrm>
-          <a:prstGeom prst="rect">
-            <a:avLst/>
-          </a:prstGeom>
-          <a:noFill/>
-        </p:spPr>
-        <p:txBody>
-          <a:bodyPr wrap="square">
-            <a:spAutoFit/>
-          </a:bodyPr>
-          <a:lstStyle/>
-          <a:p>
-            <a:pPr>
-              <a:defRPr sz="1300" i="1">
-                <a:solidFill>
-                  <a:srgbClr val="808080"/>
-                </a:solidFill>
-              </a:defRPr>
-            </a:pPr>
-            <a:r>
-              <a:t>TODO SLIDE — charts not yet pulled locally; text-only placeholder for now.</a:t>
+              <a:t>•  Both used identical early-stopping criteria (patience=20 on validation Dice) so the stopping points are directly comparable</a:t>
             </a:r>
           </a:p>
         </p:txBody>
